--- a/FINAL_SUBMISSION_V5_CANDIDATE_20261014/presentation_demo_v5/TCAS_Demo_V5.pptx
+++ b/FINAL_SUBMISSION_V5_CANDIDATE_20261014/presentation_demo_v5/TCAS_Demo_V5.pptx
@@ -331,7 +331,7 @@
               <a:rPr b="0" lang="en-US" sz="2000" spc="-1" strike="noStrike">
                 <a:latin typeface="Arial"/>
               </a:rPr>
-              <a:t>This presentation summarizes the V5 journal study of timestep-conditioned adapter scaling for multi-view diffusion texture generation. The focus is what survives comparison with strong controls and evaluation on baked assets.</a:t>
+              <a:t>This demo uses AI-generated narration. This presentation summarizes the V5 journal study of timestep-conditioned adapter scaling for multi-view diffusion texture generation. The focus is what survives comparison with strong controls and evaluation on baked assets.</a:t>
             </a:r>
             <a:endParaRPr b="0" lang="en-US" sz="2000" spc="-1" strike="noStrike">
               <a:latin typeface="Arial"/>
